--- a/Fase 2/Evidencias Grupales/Presentación.pptx
+++ b/Fase 2/Evidencias Grupales/Presentación.pptx
@@ -271,7 +271,7 @@
           <a:p>
             <a:fld id="{668DBDB6-8302-4BFF-A864-4770071891FC}" type="datetimeFigureOut">
               <a:rPr lang="es-CL" smtClean="0"/>
-              <a:t>17-10-2026</a:t>
+              <a:t>18-10-2026</a:t>
             </a:fld>
             <a:endParaRPr lang="es-CL"/>
           </a:p>
@@ -471,7 +471,7 @@
           <a:p>
             <a:fld id="{668DBDB6-8302-4BFF-A864-4770071891FC}" type="datetimeFigureOut">
               <a:rPr lang="es-CL" smtClean="0"/>
-              <a:t>17-10-2026</a:t>
+              <a:t>18-10-2026</a:t>
             </a:fld>
             <a:endParaRPr lang="es-CL"/>
           </a:p>
@@ -681,7 +681,7 @@
           <a:p>
             <a:fld id="{668DBDB6-8302-4BFF-A864-4770071891FC}" type="datetimeFigureOut">
               <a:rPr lang="es-CL" smtClean="0"/>
-              <a:t>17-10-2026</a:t>
+              <a:t>18-10-2026</a:t>
             </a:fld>
             <a:endParaRPr lang="es-CL"/>
           </a:p>
@@ -881,7 +881,7 @@
           <a:p>
             <a:fld id="{668DBDB6-8302-4BFF-A864-4770071891FC}" type="datetimeFigureOut">
               <a:rPr lang="es-CL" smtClean="0"/>
-              <a:t>17-10-2026</a:t>
+              <a:t>18-10-2026</a:t>
             </a:fld>
             <a:endParaRPr lang="es-CL"/>
           </a:p>
@@ -1157,7 +1157,7 @@
           <a:p>
             <a:fld id="{668DBDB6-8302-4BFF-A864-4770071891FC}" type="datetimeFigureOut">
               <a:rPr lang="es-CL" smtClean="0"/>
-              <a:t>17-10-2026</a:t>
+              <a:t>18-10-2026</a:t>
             </a:fld>
             <a:endParaRPr lang="es-CL"/>
           </a:p>
@@ -1425,7 +1425,7 @@
           <a:p>
             <a:fld id="{668DBDB6-8302-4BFF-A864-4770071891FC}" type="datetimeFigureOut">
               <a:rPr lang="es-CL" smtClean="0"/>
-              <a:t>17-10-2026</a:t>
+              <a:t>18-10-2026</a:t>
             </a:fld>
             <a:endParaRPr lang="es-CL"/>
           </a:p>
@@ -1840,7 +1840,7 @@
           <a:p>
             <a:fld id="{668DBDB6-8302-4BFF-A864-4770071891FC}" type="datetimeFigureOut">
               <a:rPr lang="es-CL" smtClean="0"/>
-              <a:t>17-10-2026</a:t>
+              <a:t>18-10-2026</a:t>
             </a:fld>
             <a:endParaRPr lang="es-CL"/>
           </a:p>
@@ -1982,7 +1982,7 @@
           <a:p>
             <a:fld id="{668DBDB6-8302-4BFF-A864-4770071891FC}" type="datetimeFigureOut">
               <a:rPr lang="es-CL" smtClean="0"/>
-              <a:t>17-10-2026</a:t>
+              <a:t>18-10-2026</a:t>
             </a:fld>
             <a:endParaRPr lang="es-CL"/>
           </a:p>
@@ -2095,7 +2095,7 @@
           <a:p>
             <a:fld id="{668DBDB6-8302-4BFF-A864-4770071891FC}" type="datetimeFigureOut">
               <a:rPr lang="es-CL" smtClean="0"/>
-              <a:t>17-10-2026</a:t>
+              <a:t>18-10-2026</a:t>
             </a:fld>
             <a:endParaRPr lang="es-CL"/>
           </a:p>
@@ -2408,7 +2408,7 @@
           <a:p>
             <a:fld id="{668DBDB6-8302-4BFF-A864-4770071891FC}" type="datetimeFigureOut">
               <a:rPr lang="es-CL" smtClean="0"/>
-              <a:t>17-10-2026</a:t>
+              <a:t>18-10-2026</a:t>
             </a:fld>
             <a:endParaRPr lang="es-CL"/>
           </a:p>
@@ -2697,7 +2697,7 @@
           <a:p>
             <a:fld id="{668DBDB6-8302-4BFF-A864-4770071891FC}" type="datetimeFigureOut">
               <a:rPr lang="es-CL" smtClean="0"/>
-              <a:t>17-10-2026</a:t>
+              <a:t>18-10-2026</a:t>
             </a:fld>
             <a:endParaRPr lang="es-CL"/>
           </a:p>
@@ -2940,7 +2940,7 @@
           <a:p>
             <a:fld id="{668DBDB6-8302-4BFF-A864-4770071891FC}" type="datetimeFigureOut">
               <a:rPr lang="es-CL" smtClean="0"/>
-              <a:t>17-10-2026</a:t>
+              <a:t>18-10-2026</a:t>
             </a:fld>
             <a:endParaRPr lang="es-CL"/>
           </a:p>
@@ -19723,7 +19723,7 @@
                 </a:solidFill>
                 <a:latin typeface="Segoe UI" panose="020B0502040204020203" pitchFamily="34" charset="0"/>
               </a:rPr>
-              <a:t>Competencias del plan de estudios trabajadas en el proyecto (Informe Final).</a:t>
+              <a:t>Competencias del perfil de egreso evaluadas en esta instancia y su evidencia en el proyecto.</a:t>
             </a:r>
             <a:endParaRPr lang="es-CL" sz="1250">
               <a:solidFill>
@@ -19736,10 +19736,10 @@
       </p:sp>
       <p:sp>
         <p:nvSpPr>
-          <p:cNvPr id="5" name="Rectángulo: esquinas redondeadas 4">
-            <a:extLst>
-              <a:ext uri="{FF2B5EF4-FFF2-40B4-BE49-F238E27FC236}">
-                <a16:creationId xmlns:a16="http://schemas.microsoft.com/office/drawing/2014/main" id="{6A244475-554C-4396-B646-25382D7B1F22}"/>
+          <p:cNvPr id="21" name="Rectángulo: esquinas redondeadas 20">
+            <a:extLst>
+              <a:ext uri="{FF2B5EF4-FFF2-40B4-BE49-F238E27FC236}">
+                <a16:creationId xmlns:a16="http://schemas.microsoft.com/office/drawing/2014/main" id="{BEF7D1FE-92BB-4003-8424-8AE0E3E03296}"/>
               </a:ext>
             </a:extLst>
           </p:cNvPr>
@@ -19748,12 +19748,252 @@
         </p:nvSpPr>
         <p:spPr>
           <a:xfrm>
-            <a:off x="762000" y="1600200"/>
-            <a:ext cx="10668000" cy="914400"/>
+            <a:off x="762000" y="5740400"/>
+            <a:ext cx="10668000" cy="508000"/>
           </a:xfrm>
           <a:prstGeom prst="roundRect">
             <a:avLst>
-              <a:gd name="adj" fmla="val 10000"/>
+              <a:gd name="adj" fmla="val 15000"/>
+            </a:avLst>
+          </a:prstGeom>
+          <a:solidFill>
+            <a:srgbClr val="EEF2FF"/>
+          </a:solidFill>
+          <a:ln w="12700" cap="flat" cmpd="sng" algn="ctr">
+            <a:noFill/>
+            <a:prstDash val="solid"/>
+            <a:miter lim="800000"/>
+          </a:ln>
+          <a:effectLst/>
+          <a:extLst>
+            <a:ext uri="{91240B29-F687-4F45-9708-019B960494DF}">
+              <a14:hiddenLine xmlns:a14="http://schemas.microsoft.com/office/drawing/2010/main" w="12700" cap="flat" cmpd="sng" algn="ctr">
+                <a:solidFill>
+                  <a:schemeClr val="accent1">
+                    <a:shade val="50000"/>
+                  </a:schemeClr>
+                </a:solidFill>
+                <a:prstDash val="solid"/>
+                <a:miter lim="800000"/>
+              </a14:hiddenLine>
+            </a:ext>
+          </a:extLst>
+        </p:spPr>
+        <p:style>
+          <a:lnRef idx="2">
+            <a:schemeClr val="accent1">
+              <a:shade val="50000"/>
+            </a:schemeClr>
+          </a:lnRef>
+          <a:fillRef idx="1">
+            <a:schemeClr val="accent1"/>
+          </a:fillRef>
+          <a:effectRef idx="0">
+            <a:schemeClr val="accent1"/>
+          </a:effectRef>
+          <a:fontRef idx="minor">
+            <a:schemeClr val="lt1"/>
+          </a:fontRef>
+        </p:style>
+        <p:txBody>
+          <a:bodyPr rtlCol="0" anchor="ctr"/>
+          <a:lstStyle/>
+          <a:p>
+            <a:pPr algn="ctr"/>
+            <a:endParaRPr lang="es-CL"/>
+          </a:p>
+        </p:txBody>
+      </p:sp>
+      <p:sp>
+        <p:nvSpPr>
+          <p:cNvPr id="22" name="CuadroTexto 21">
+            <a:extLst>
+              <a:ext uri="{FF2B5EF4-FFF2-40B4-BE49-F238E27FC236}">
+                <a16:creationId xmlns:a16="http://schemas.microsoft.com/office/drawing/2014/main" id="{5EE8C9BA-70AB-4147-9816-13E18365BD94}"/>
+              </a:ext>
+            </a:extLst>
+          </p:cNvPr>
+          <p:cNvSpPr txBox="1"/>
+          <p:nvPr/>
+        </p:nvSpPr>
+        <p:spPr>
+          <a:xfrm>
+            <a:off x="1041400" y="5854700"/>
+            <a:ext cx="10160000" cy="276999"/>
+          </a:xfrm>
+          <a:prstGeom prst="rect">
+            <a:avLst/>
+          </a:prstGeom>
+          <a:noFill/>
+        </p:spPr>
+        <p:txBody>
+          <a:bodyPr vert="horz" wrap="square" lIns="0" tIns="0" rIns="0" bIns="0" rtlCol="0" anchor="t">
+            <a:noAutofit/>
+          </a:bodyPr>
+          <a:lstStyle/>
+          <a:p>
+            <a:pPr>
+              <a:spcAft>
+                <a:spcPts val="300"/>
+              </a:spcAft>
+            </a:pPr>
+            <a:r>
+              <a:rPr lang="es-MX" sz="1150" b="1">
+                <a:solidFill>
+                  <a:srgbClr val="4F46E5"/>
+                </a:solidFill>
+                <a:latin typeface="Segoe UI" panose="020B0502040204020203" pitchFamily="34" charset="0"/>
+              </a:rPr>
+              <a:t>El proyecto aborda las cuatro competencias del perfil de egreso evaluadas en esta instancia.</a:t>
+            </a:r>
+            <a:endParaRPr lang="es-CL" sz="1150" b="1">
+              <a:solidFill>
+                <a:srgbClr val="4F46E5"/>
+              </a:solidFill>
+              <a:latin typeface="Segoe UI" panose="020B0502040204020203" pitchFamily="34" charset="0"/>
+            </a:endParaRPr>
+          </a:p>
+        </p:txBody>
+      </p:sp>
+      <p:sp>
+        <p:nvSpPr>
+          <p:cNvPr id="23" name="CuadroTexto 22">
+            <a:extLst>
+              <a:ext uri="{FF2B5EF4-FFF2-40B4-BE49-F238E27FC236}">
+                <a16:creationId xmlns:a16="http://schemas.microsoft.com/office/drawing/2014/main" id="{DFD725A4-B55D-414D-8F74-D5492BA2B161}"/>
+              </a:ext>
+            </a:extLst>
+          </p:cNvPr>
+          <p:cNvSpPr txBox="1"/>
+          <p:nvPr/>
+        </p:nvSpPr>
+        <p:spPr>
+          <a:xfrm>
+            <a:off x="762000" y="6451600"/>
+            <a:ext cx="7112000" cy="276999"/>
+          </a:xfrm>
+          <a:prstGeom prst="rect">
+            <a:avLst/>
+          </a:prstGeom>
+          <a:noFill/>
+        </p:spPr>
+        <p:txBody>
+          <a:bodyPr vert="horz" wrap="square" lIns="0" tIns="0" rIns="0" bIns="0" rtlCol="0" anchor="t">
+            <a:noAutofit/>
+          </a:bodyPr>
+          <a:lstStyle/>
+          <a:p>
+            <a:pPr>
+              <a:spcAft>
+                <a:spcPts val="300"/>
+              </a:spcAft>
+            </a:pPr>
+            <a:r>
+              <a:rPr lang="es-MX" sz="900">
+                <a:solidFill>
+                  <a:srgbClr val="94A3B8"/>
+                </a:solidFill>
+                <a:latin typeface="Segoe UI" panose="020B0502040204020203" pitchFamily="34" charset="0"/>
+              </a:rPr>
+              <a:t>CACHAI-QA  .  Proyecto APT  .  Evaluacion Sumativa 2</a:t>
+            </a:r>
+            <a:endParaRPr lang="es-CL" sz="900">
+              <a:solidFill>
+                <a:srgbClr val="94A3B8"/>
+              </a:solidFill>
+              <a:latin typeface="Segoe UI" panose="020B0502040204020203" pitchFamily="34" charset="0"/>
+            </a:endParaRPr>
+          </a:p>
+        </p:txBody>
+      </p:sp>
+      <p:sp>
+        <p:nvSpPr>
+          <p:cNvPr id="25" name="Rectángulo 24">
+            <a:extLst>
+              <a:ext uri="{FF2B5EF4-FFF2-40B4-BE49-F238E27FC236}">
+                <a16:creationId xmlns:a16="http://schemas.microsoft.com/office/drawing/2014/main" id="{6A3A2EED-7C1A-45F3-8685-B61F583BB8A8}"/>
+              </a:ext>
+            </a:extLst>
+          </p:cNvPr>
+          <p:cNvSpPr/>
+          <p:nvPr/>
+        </p:nvSpPr>
+        <p:spPr>
+          <a:xfrm>
+            <a:off x="762000" y="6375400"/>
+            <a:ext cx="10668000" cy="9525"/>
+          </a:xfrm>
+          <a:prstGeom prst="rect">
+            <a:avLst/>
+          </a:prstGeom>
+          <a:solidFill>
+            <a:srgbClr val="E2E8F0"/>
+          </a:solidFill>
+          <a:ln w="12700" cap="flat" cmpd="sng" algn="ctr">
+            <a:noFill/>
+            <a:prstDash val="solid"/>
+            <a:miter lim="800000"/>
+          </a:ln>
+          <a:effectLst/>
+          <a:extLst>
+            <a:ext uri="{91240B29-F687-4F45-9708-019B960494DF}">
+              <a14:hiddenLine xmlns:a14="http://schemas.microsoft.com/office/drawing/2010/main" w="12700" cap="flat" cmpd="sng" algn="ctr">
+                <a:solidFill>
+                  <a:schemeClr val="accent1">
+                    <a:shade val="50000"/>
+                  </a:schemeClr>
+                </a:solidFill>
+                <a:prstDash val="solid"/>
+                <a:miter lim="800000"/>
+              </a14:hiddenLine>
+            </a:ext>
+          </a:extLst>
+        </p:spPr>
+        <p:style>
+          <a:lnRef idx="2">
+            <a:schemeClr val="accent1">
+              <a:shade val="50000"/>
+            </a:schemeClr>
+          </a:lnRef>
+          <a:fillRef idx="1">
+            <a:schemeClr val="accent1"/>
+          </a:fillRef>
+          <a:effectRef idx="0">
+            <a:schemeClr val="accent1"/>
+          </a:effectRef>
+          <a:fontRef idx="minor">
+            <a:schemeClr val="lt1"/>
+          </a:fontRef>
+        </p:style>
+        <p:txBody>
+          <a:bodyPr rtlCol="0" anchor="ctr"/>
+          <a:lstStyle/>
+          <a:p>
+            <a:pPr algn="ctr"/>
+            <a:endParaRPr lang="es-CL"/>
+          </a:p>
+        </p:txBody>
+      </p:sp>
+      <p:sp>
+        <p:nvSpPr>
+          <p:cNvPr id="5" name="Rectángulo: esquinas redondeadas 4">
+            <a:extLst>
+              <a:ext uri="{FF2B5EF4-FFF2-40B4-BE49-F238E27FC236}">
+                <a16:creationId xmlns:a16="http://schemas.microsoft.com/office/drawing/2014/main" id="{52ADF6BC-9BA1-4674-85A0-C454A4402FA0}"/>
+              </a:ext>
+            </a:extLst>
+          </p:cNvPr>
+          <p:cNvSpPr/>
+          <p:nvPr/>
+        </p:nvSpPr>
+        <p:spPr>
+          <a:xfrm>
+            <a:off x="762000" y="1574800"/>
+            <a:ext cx="10668000" cy="965200"/>
+          </a:xfrm>
+          <a:prstGeom prst="roundRect">
+            <a:avLst>
+              <a:gd name="adj" fmla="val 8000"/>
             </a:avLst>
           </a:prstGeom>
           <a:solidFill>
@@ -19809,7 +20049,7 @@
           <p:cNvPr id="6" name="Rectángulo 5">
             <a:extLst>
               <a:ext uri="{FF2B5EF4-FFF2-40B4-BE49-F238E27FC236}">
-                <a16:creationId xmlns:a16="http://schemas.microsoft.com/office/drawing/2014/main" id="{3A8439FC-A75A-43A5-9C5F-85C66917B8C1}"/>
+                <a16:creationId xmlns:a16="http://schemas.microsoft.com/office/drawing/2014/main" id="{C99AF0A8-788D-4EFB-A1F4-512C1F5413DA}"/>
               </a:ext>
             </a:extLst>
           </p:cNvPr>
@@ -19818,8 +20058,8 @@
         </p:nvSpPr>
         <p:spPr>
           <a:xfrm>
-            <a:off x="762000" y="1600200"/>
-            <a:ext cx="63500" cy="914400"/>
+            <a:off x="762000" y="1574800"/>
+            <a:ext cx="63500" cy="965200"/>
           </a:xfrm>
           <a:prstGeom prst="rect">
             <a:avLst/>
@@ -19877,7 +20117,7 @@
           <p:cNvPr id="7" name="CuadroTexto 6">
             <a:extLst>
               <a:ext uri="{FF2B5EF4-FFF2-40B4-BE49-F238E27FC236}">
-                <a16:creationId xmlns:a16="http://schemas.microsoft.com/office/drawing/2014/main" id="{9CAF1B7A-8D66-4287-973F-9883CF6AC329}"/>
+                <a16:creationId xmlns:a16="http://schemas.microsoft.com/office/drawing/2014/main" id="{ADD2E113-1457-418A-B1E8-191097816838}"/>
               </a:ext>
             </a:extLst>
           </p:cNvPr>
@@ -19886,7 +20126,7 @@
         </p:nvSpPr>
         <p:spPr>
           <a:xfrm>
-            <a:off x="1041400" y="1701800"/>
+            <a:off x="1041400" y="1638300"/>
             <a:ext cx="10236200" cy="276999"/>
           </a:xfrm>
           <a:prstGeom prst="rect">
@@ -19900,21 +20140,16 @@
           </a:bodyPr>
           <a:lstStyle/>
           <a:p>
-            <a:pPr>
-              <a:spcAft>
-                <a:spcPts val="300"/>
-              </a:spcAft>
-            </a:pPr>
-            <a:r>
-              <a:rPr lang="es-MX" sz="1100" b="1">
+            <a:r>
+              <a:rPr lang="es-MX" sz="1200" b="1">
                 <a:solidFill>
                   <a:srgbClr val="1E293B"/>
                 </a:solidFill>
                 <a:latin typeface="Segoe UI" panose="020B0502040204020203" pitchFamily="34" charset="0"/>
               </a:rPr>
-              <a:t>Diseñar y aplicar pruebas de validación de productos y procesos, utilizando buenas prácticas de la industria para asegurar la calidad del software.</a:t>
-            </a:r>
-            <a:endParaRPr lang="es-CL" sz="1100" b="1">
+              <a:t>Realizar pruebas de certificación de los productos y de los procesos</a:t>
+            </a:r>
+            <a:endParaRPr lang="es-CL" sz="1200" b="1">
               <a:solidFill>
                 <a:srgbClr val="1E293B"/>
               </a:solidFill>
@@ -19928,7 +20163,7 @@
           <p:cNvPr id="8" name="CuadroTexto 7">
             <a:extLst>
               <a:ext uri="{FF2B5EF4-FFF2-40B4-BE49-F238E27FC236}">
-                <a16:creationId xmlns:a16="http://schemas.microsoft.com/office/drawing/2014/main" id="{2F87790E-D8D0-4076-A7EE-12BE6C98E670}"/>
+                <a16:creationId xmlns:a16="http://schemas.microsoft.com/office/drawing/2014/main" id="{040067CC-0AB1-425E-963E-7CEEE091DAD8}"/>
               </a:ext>
             </a:extLst>
           </p:cNvPr>
@@ -19937,7 +20172,7 @@
         </p:nvSpPr>
         <p:spPr>
           <a:xfrm>
-            <a:off x="1041400" y="2159000"/>
+            <a:off x="1041400" y="1879600"/>
             <a:ext cx="10236200" cy="276999"/>
           </a:xfrm>
           <a:prstGeom prst="rect">
@@ -19951,21 +20186,56 @@
           </a:bodyPr>
           <a:lstStyle/>
           <a:p>
-            <a:pPr>
-              <a:spcAft>
-                <a:spcPts val="300"/>
-              </a:spcAft>
-            </a:pPr>
-            <a:r>
-              <a:rPr lang="es-MX" sz="1000">
+            <a:r>
+              <a:rPr lang="es-CL" sz="950" b="1">
+                <a:solidFill>
+                  <a:srgbClr val="4F46E5"/>
+                </a:solidFill>
+                <a:latin typeface="Segoe UI" panose="020B0502040204020203" pitchFamily="34" charset="0"/>
+              </a:rPr>
+              <a:t>Diseña · Aplica · Desarrolla mejoras</a:t>
+            </a:r>
+          </a:p>
+        </p:txBody>
+      </p:sp>
+      <p:sp>
+        <p:nvSpPr>
+          <p:cNvPr id="9" name="CuadroTexto 8">
+            <a:extLst>
+              <a:ext uri="{FF2B5EF4-FFF2-40B4-BE49-F238E27FC236}">
+                <a16:creationId xmlns:a16="http://schemas.microsoft.com/office/drawing/2014/main" id="{F93B4067-6542-42EB-865F-37B6FABBEC01}"/>
+              </a:ext>
+            </a:extLst>
+          </p:cNvPr>
+          <p:cNvSpPr txBox="1"/>
+          <p:nvPr/>
+        </p:nvSpPr>
+        <p:spPr>
+          <a:xfrm>
+            <a:off x="1041400" y="2082800"/>
+            <a:ext cx="10236200" cy="276999"/>
+          </a:xfrm>
+          <a:prstGeom prst="rect">
+            <a:avLst/>
+          </a:prstGeom>
+          <a:noFill/>
+        </p:spPr>
+        <p:txBody>
+          <a:bodyPr vert="horz" wrap="square" lIns="0" tIns="0" rIns="0" bIns="0" rtlCol="0" anchor="t">
+            <a:noAutofit/>
+          </a:bodyPr>
+          <a:lstStyle/>
+          <a:p>
+            <a:r>
+              <a:rPr lang="es-MX" sz="950">
                 <a:solidFill>
                   <a:srgbClr val="64748B"/>
                 </a:solidFill>
                 <a:latin typeface="Segoe UI" panose="020B0502040204020203" pitchFamily="34" charset="0"/>
               </a:rPr>
-              <a:t>Evidencia: Product Backlog, Definition of Done, escenarios Gherkin y la batería de pruebas ejecutada sobre el sitio demo.</a:t>
-            </a:r>
-            <a:endParaRPr lang="es-CL" sz="1000">
+              <a:t>HU-001 a HU-008 con criterios de aceptación y Definition of Done; 58 escenarios generados en lenguaje natural sobre el sitio demo; 6 ejecuciones registradas (11, 13 y 16 de octubre) con 58 pruebas y 0 fallidas; de los resultados surgieron los modos de escaneo y las esperas dinámicas.</a:t>
+            </a:r>
+            <a:endParaRPr lang="es-CL" sz="950">
               <a:solidFill>
                 <a:srgbClr val="64748B"/>
               </a:solidFill>
@@ -19976,10 +20246,10 @@
       </p:sp>
       <p:sp>
         <p:nvSpPr>
-          <p:cNvPr id="9" name="Rectángulo: esquinas redondeadas 8">
-            <a:extLst>
-              <a:ext uri="{FF2B5EF4-FFF2-40B4-BE49-F238E27FC236}">
-                <a16:creationId xmlns:a16="http://schemas.microsoft.com/office/drawing/2014/main" id="{ACFB7E62-EF7A-45A6-BAE2-256780CB6167}"/>
+          <p:cNvPr id="10" name="Rectángulo: esquinas redondeadas 9">
+            <a:extLst>
+              <a:ext uri="{FF2B5EF4-FFF2-40B4-BE49-F238E27FC236}">
+                <a16:creationId xmlns:a16="http://schemas.microsoft.com/office/drawing/2014/main" id="{5531888F-15D4-45C5-A74D-8F16590C6398}"/>
               </a:ext>
             </a:extLst>
           </p:cNvPr>
@@ -19988,12 +20258,12 @@
         </p:nvSpPr>
         <p:spPr>
           <a:xfrm>
-            <a:off x="762000" y="2603500"/>
-            <a:ext cx="10668000" cy="914400"/>
+            <a:off x="762000" y="2616200"/>
+            <a:ext cx="10668000" cy="965200"/>
           </a:xfrm>
           <a:prstGeom prst="roundRect">
             <a:avLst>
-              <a:gd name="adj" fmla="val 10000"/>
+              <a:gd name="adj" fmla="val 8000"/>
             </a:avLst>
           </a:prstGeom>
           <a:solidFill>
@@ -20046,10 +20316,10 @@
       </p:sp>
       <p:sp>
         <p:nvSpPr>
-          <p:cNvPr id="10" name="Rectángulo 9">
-            <a:extLst>
-              <a:ext uri="{FF2B5EF4-FFF2-40B4-BE49-F238E27FC236}">
-                <a16:creationId xmlns:a16="http://schemas.microsoft.com/office/drawing/2014/main" id="{42E79DDA-92D2-4857-879E-CA2EE0534E56}"/>
+          <p:cNvPr id="11" name="Rectángulo 10">
+            <a:extLst>
+              <a:ext uri="{FF2B5EF4-FFF2-40B4-BE49-F238E27FC236}">
+                <a16:creationId xmlns:a16="http://schemas.microsoft.com/office/drawing/2014/main" id="{04C4A9C6-2F06-4CAE-B9F7-E4A3B4590227}"/>
               </a:ext>
             </a:extLst>
           </p:cNvPr>
@@ -20058,8 +20328,8 @@
         </p:nvSpPr>
         <p:spPr>
           <a:xfrm>
-            <a:off x="762000" y="2603500"/>
-            <a:ext cx="63500" cy="914400"/>
+            <a:off x="762000" y="2616200"/>
+            <a:ext cx="63500" cy="965200"/>
           </a:xfrm>
           <a:prstGeom prst="rect">
             <a:avLst/>
@@ -20114,10 +20384,10 @@
       </p:sp>
       <p:sp>
         <p:nvSpPr>
-          <p:cNvPr id="11" name="CuadroTexto 10">
-            <a:extLst>
-              <a:ext uri="{FF2B5EF4-FFF2-40B4-BE49-F238E27FC236}">
-                <a16:creationId xmlns:a16="http://schemas.microsoft.com/office/drawing/2014/main" id="{97EE172D-6149-427C-8A31-1B870770A5F2}"/>
+          <p:cNvPr id="12" name="CuadroTexto 11">
+            <a:extLst>
+              <a:ext uri="{FF2B5EF4-FFF2-40B4-BE49-F238E27FC236}">
+                <a16:creationId xmlns:a16="http://schemas.microsoft.com/office/drawing/2014/main" id="{F2AA2321-51E6-4ED9-B6E0-55B9BC16E5A6}"/>
               </a:ext>
             </a:extLst>
           </p:cNvPr>
@@ -20126,7 +20396,7 @@
         </p:nvSpPr>
         <p:spPr>
           <a:xfrm>
-            <a:off x="1041400" y="2705100"/>
+            <a:off x="1041400" y="2679700"/>
             <a:ext cx="10236200" cy="276999"/>
           </a:xfrm>
           <a:prstGeom prst="rect">
@@ -20140,21 +20410,16 @@
           </a:bodyPr>
           <a:lstStyle/>
           <a:p>
-            <a:pPr>
-              <a:spcAft>
-                <a:spcPts val="300"/>
-              </a:spcAft>
-            </a:pPr>
-            <a:r>
-              <a:rPr lang="es-MX" sz="1100" b="1">
+            <a:r>
+              <a:rPr lang="es-MX" sz="1200" b="1">
                 <a:solidFill>
                   <a:srgbClr val="1E293B"/>
                 </a:solidFill>
                 <a:latin typeface="Segoe UI" panose="020B0502040204020203" pitchFamily="34" charset="0"/>
               </a:rPr>
-              <a:t>Programar y construir soluciones de software, integrando componentes y servicios para dar respuesta a los requerimientos de una organización.</a:t>
-            </a:r>
-            <a:endParaRPr lang="es-CL" sz="1100" b="1">
+              <a:t>Gestionar proyectos informáticos, ofreciendo alternativas para la toma de decisiones</a:t>
+            </a:r>
+            <a:endParaRPr lang="es-CL" sz="1200" b="1">
               <a:solidFill>
                 <a:srgbClr val="1E293B"/>
               </a:solidFill>
@@ -20165,10 +20430,10 @@
       </p:sp>
       <p:sp>
         <p:nvSpPr>
-          <p:cNvPr id="12" name="CuadroTexto 11">
-            <a:extLst>
-              <a:ext uri="{FF2B5EF4-FFF2-40B4-BE49-F238E27FC236}">
-                <a16:creationId xmlns:a16="http://schemas.microsoft.com/office/drawing/2014/main" id="{92D94104-355E-4C08-B116-A59A137596A9}"/>
+          <p:cNvPr id="13" name="CuadroTexto 12">
+            <a:extLst>
+              <a:ext uri="{FF2B5EF4-FFF2-40B4-BE49-F238E27FC236}">
+                <a16:creationId xmlns:a16="http://schemas.microsoft.com/office/drawing/2014/main" id="{4751EF30-B342-41BD-BA1C-D7E1099466AC}"/>
               </a:ext>
             </a:extLst>
           </p:cNvPr>
@@ -20177,7 +20442,7 @@
         </p:nvSpPr>
         <p:spPr>
           <a:xfrm>
-            <a:off x="1041400" y="3162300"/>
+            <a:off x="1041400" y="2921000"/>
             <a:ext cx="10236200" cy="276999"/>
           </a:xfrm>
           <a:prstGeom prst="rect">
@@ -20191,21 +20456,56 @@
           </a:bodyPr>
           <a:lstStyle/>
           <a:p>
-            <a:pPr>
-              <a:spcAft>
-                <a:spcPts val="300"/>
-              </a:spcAft>
-            </a:pPr>
-            <a:r>
-              <a:rPr lang="es-MX" sz="1000">
+            <a:r>
+              <a:rPr lang="es-CL" sz="950" b="1">
+                <a:solidFill>
+                  <a:srgbClr val="06B6D4"/>
+                </a:solidFill>
+                <a:latin typeface="Segoe UI" panose="020B0502040204020203" pitchFamily="34" charset="0"/>
+              </a:rPr>
+              <a:t>Planifica · Controla</a:t>
+            </a:r>
+          </a:p>
+        </p:txBody>
+      </p:sp>
+      <p:sp>
+        <p:nvSpPr>
+          <p:cNvPr id="14" name="CuadroTexto 13">
+            <a:extLst>
+              <a:ext uri="{FF2B5EF4-FFF2-40B4-BE49-F238E27FC236}">
+                <a16:creationId xmlns:a16="http://schemas.microsoft.com/office/drawing/2014/main" id="{FED59F67-469B-44FB-8B8A-EBC2A7D571E6}"/>
+              </a:ext>
+            </a:extLst>
+          </p:cNvPr>
+          <p:cNvSpPr txBox="1"/>
+          <p:nvPr/>
+        </p:nvSpPr>
+        <p:spPr>
+          <a:xfrm>
+            <a:off x="1041400" y="3124200"/>
+            <a:ext cx="10236200" cy="276999"/>
+          </a:xfrm>
+          <a:prstGeom prst="rect">
+            <a:avLst/>
+          </a:prstGeom>
+          <a:noFill/>
+        </p:spPr>
+        <p:txBody>
+          <a:bodyPr vert="horz" wrap="square" lIns="0" tIns="0" rIns="0" bIns="0" rtlCol="0" anchor="t">
+            <a:noAutofit/>
+          </a:bodyPr>
+          <a:lstStyle/>
+          <a:p>
+            <a:r>
+              <a:rPr lang="es-MX" sz="950">
                 <a:solidFill>
                   <a:srgbClr val="64748B"/>
                 </a:solidFill>
                 <a:latin typeface="Segoe UI" panose="020B0502040204020203" pitchFamily="34" charset="0"/>
               </a:rPr>
-              <a:t>Evidencia: framework en TypeScript y Node.js con crawler, generador, ejecutor y adaptador de nube planificado.</a:t>
-            </a:r>
-            <a:endParaRPr lang="es-CL" sz="1000">
+              <a:t>Plan de 14 semanas por competencia, actividad y responsable; backlog priorizado con Poker Planning (7 épicas, 8 historias, 4 sprints); monitoreo con estados y ajustes; re-planificación por subestimación del alcance y postergación de BrowserStack.</a:t>
+            </a:r>
+            <a:endParaRPr lang="es-CL" sz="950">
               <a:solidFill>
                 <a:srgbClr val="64748B"/>
               </a:solidFill>
@@ -20216,10 +20516,10 @@
       </p:sp>
       <p:sp>
         <p:nvSpPr>
-          <p:cNvPr id="13" name="Rectángulo: esquinas redondeadas 12">
-            <a:extLst>
-              <a:ext uri="{FF2B5EF4-FFF2-40B4-BE49-F238E27FC236}">
-                <a16:creationId xmlns:a16="http://schemas.microsoft.com/office/drawing/2014/main" id="{72408B1C-0830-457C-811B-0524274978FA}"/>
+          <p:cNvPr id="15" name="Rectángulo: esquinas redondeadas 14">
+            <a:extLst>
+              <a:ext uri="{FF2B5EF4-FFF2-40B4-BE49-F238E27FC236}">
+                <a16:creationId xmlns:a16="http://schemas.microsoft.com/office/drawing/2014/main" id="{7221AACB-068B-43C2-B982-188B70EDDD39}"/>
               </a:ext>
             </a:extLst>
           </p:cNvPr>
@@ -20228,12 +20528,12 @@
         </p:nvSpPr>
         <p:spPr>
           <a:xfrm>
-            <a:off x="762000" y="3606800"/>
-            <a:ext cx="10668000" cy="914400"/>
+            <a:off x="762000" y="3657600"/>
+            <a:ext cx="10668000" cy="965200"/>
           </a:xfrm>
           <a:prstGeom prst="roundRect">
             <a:avLst>
-              <a:gd name="adj" fmla="val 10000"/>
+              <a:gd name="adj" fmla="val 8000"/>
             </a:avLst>
           </a:prstGeom>
           <a:solidFill>
@@ -20286,10 +20586,10 @@
       </p:sp>
       <p:sp>
         <p:nvSpPr>
-          <p:cNvPr id="14" name="Rectángulo 13">
-            <a:extLst>
-              <a:ext uri="{FF2B5EF4-FFF2-40B4-BE49-F238E27FC236}">
-                <a16:creationId xmlns:a16="http://schemas.microsoft.com/office/drawing/2014/main" id="{95F1E627-A414-40CD-A43E-99EB6BAA0129}"/>
+          <p:cNvPr id="16" name="Rectángulo 15">
+            <a:extLst>
+              <a:ext uri="{FF2B5EF4-FFF2-40B4-BE49-F238E27FC236}">
+                <a16:creationId xmlns:a16="http://schemas.microsoft.com/office/drawing/2014/main" id="{8BAEC7B5-43DC-47EC-A54C-E7C8D5D559DF}"/>
               </a:ext>
             </a:extLst>
           </p:cNvPr>
@@ -20298,8 +20598,8 @@
         </p:nvSpPr>
         <p:spPr>
           <a:xfrm>
-            <a:off x="762000" y="3606800"/>
-            <a:ext cx="63500" cy="914400"/>
+            <a:off x="762000" y="3657600"/>
+            <a:ext cx="63500" cy="965200"/>
           </a:xfrm>
           <a:prstGeom prst="rect">
             <a:avLst/>
@@ -20354,10 +20654,10 @@
       </p:sp>
       <p:sp>
         <p:nvSpPr>
-          <p:cNvPr id="15" name="CuadroTexto 14">
-            <a:extLst>
-              <a:ext uri="{FF2B5EF4-FFF2-40B4-BE49-F238E27FC236}">
-                <a16:creationId xmlns:a16="http://schemas.microsoft.com/office/drawing/2014/main" id="{93E7A1BA-2E74-4617-889B-5D7AD934AD33}"/>
+          <p:cNvPr id="17" name="CuadroTexto 16">
+            <a:extLst>
+              <a:ext uri="{FF2B5EF4-FFF2-40B4-BE49-F238E27FC236}">
+                <a16:creationId xmlns:a16="http://schemas.microsoft.com/office/drawing/2014/main" id="{44EE5088-6060-4886-AD65-EBD65B6E8AA4}"/>
               </a:ext>
             </a:extLst>
           </p:cNvPr>
@@ -20366,7 +20666,7 @@
         </p:nvSpPr>
         <p:spPr>
           <a:xfrm>
-            <a:off x="1041400" y="3708400"/>
+            <a:off x="1041400" y="3721100"/>
             <a:ext cx="10236200" cy="276999"/>
           </a:xfrm>
           <a:prstGeom prst="rect">
@@ -20380,21 +20680,16 @@
           </a:bodyPr>
           <a:lstStyle/>
           <a:p>
-            <a:pPr>
-              <a:spcAft>
-                <a:spcPts val="300"/>
-              </a:spcAft>
-            </a:pPr>
-            <a:r>
-              <a:rPr lang="es-MX" sz="1100" b="1">
+            <a:r>
+              <a:rPr lang="es-MX" sz="1200" b="1">
                 <a:solidFill>
                   <a:srgbClr val="1E293B"/>
                 </a:solidFill>
                 <a:latin typeface="Segoe UI" panose="020B0502040204020203" pitchFamily="34" charset="0"/>
               </a:rPr>
-              <a:t>Modelar e integrar componentes de software, asegurando su correcto funcionamiento y mantenibilidad.</a:t>
-            </a:r>
-            <a:endParaRPr lang="es-CL" sz="1100" b="1">
+              <a:t>Construir modelos de datos según un diseño definido y escalable</a:t>
+            </a:r>
+            <a:endParaRPr lang="es-CL" sz="1200" b="1">
               <a:solidFill>
                 <a:srgbClr val="1E293B"/>
               </a:solidFill>
@@ -20405,10 +20700,10 @@
       </p:sp>
       <p:sp>
         <p:nvSpPr>
-          <p:cNvPr id="16" name="CuadroTexto 15">
-            <a:extLst>
-              <a:ext uri="{FF2B5EF4-FFF2-40B4-BE49-F238E27FC236}">
-                <a16:creationId xmlns:a16="http://schemas.microsoft.com/office/drawing/2014/main" id="{5E3FF00D-7010-4357-ADDC-44C59981D1B9}"/>
+          <p:cNvPr id="18" name="CuadroTexto 17">
+            <a:extLst>
+              <a:ext uri="{FF2B5EF4-FFF2-40B4-BE49-F238E27FC236}">
+                <a16:creationId xmlns:a16="http://schemas.microsoft.com/office/drawing/2014/main" id="{5DEC603F-60BA-4B36-937F-2B7C8FF3DEA0}"/>
               </a:ext>
             </a:extLst>
           </p:cNvPr>
@@ -20417,7 +20712,7 @@
         </p:nvSpPr>
         <p:spPr>
           <a:xfrm>
-            <a:off x="1041400" y="4165600"/>
+            <a:off x="1041400" y="3962400"/>
             <a:ext cx="10236200" cy="276999"/>
           </a:xfrm>
           <a:prstGeom prst="rect">
@@ -20431,29 +20726,70 @@
           </a:bodyPr>
           <a:lstStyle/>
           <a:p>
-            <a:pPr>
-              <a:spcAft>
-                <a:spcPts val="300"/>
-              </a:spcAft>
-            </a:pPr>
-            <a:r>
-              <a:rPr lang="es-CL" sz="1000">
+            <a:r>
+              <a:rPr lang="es-CL" sz="950" b="1">
+                <a:solidFill>
+                  <a:srgbClr val="10B981"/>
+                </a:solidFill>
+                <a:latin typeface="Segoe UI" panose="020B0502040204020203" pitchFamily="34" charset="0"/>
+              </a:rPr>
+              <a:t>Diseña · Implementa</a:t>
+            </a:r>
+          </a:p>
+        </p:txBody>
+      </p:sp>
+      <p:sp>
+        <p:nvSpPr>
+          <p:cNvPr id="19" name="CuadroTexto 18">
+            <a:extLst>
+              <a:ext uri="{FF2B5EF4-FFF2-40B4-BE49-F238E27FC236}">
+                <a16:creationId xmlns:a16="http://schemas.microsoft.com/office/drawing/2014/main" id="{0D8A3076-E591-46B5-BA23-61F81AB06B99}"/>
+              </a:ext>
+            </a:extLst>
+          </p:cNvPr>
+          <p:cNvSpPr txBox="1"/>
+          <p:nvPr/>
+        </p:nvSpPr>
+        <p:spPr>
+          <a:xfrm>
+            <a:off x="1041400" y="4165600"/>
+            <a:ext cx="10236200" cy="276999"/>
+          </a:xfrm>
+          <a:prstGeom prst="rect">
+            <a:avLst/>
+          </a:prstGeom>
+          <a:noFill/>
+        </p:spPr>
+        <p:txBody>
+          <a:bodyPr vert="horz" wrap="square" lIns="0" tIns="0" rIns="0" bIns="0" rtlCol="0" anchor="t">
+            <a:noAutofit/>
+          </a:bodyPr>
+          <a:lstStyle/>
+          <a:p>
+            <a:r>
+              <a:rPr lang="es-MX" sz="950">
                 <a:solidFill>
                   <a:srgbClr val="64748B"/>
                 </a:solidFill>
                 <a:latin typeface="Segoe UI" panose="020B0502040204020203" pitchFamily="34" charset="0"/>
               </a:rPr>
-              <a:t>Evidencia: arquitectura modular y Documento de Diseño UML (casos de uso, E-R, clases, secuencia y componentes).</a:t>
-            </a:r>
-          </a:p>
-        </p:txBody>
-      </p:sp>
-      <p:sp>
-        <p:nvSpPr>
-          <p:cNvPr id="17" name="Rectángulo: esquinas redondeadas 16">
-            <a:extLst>
-              <a:ext uri="{FF2B5EF4-FFF2-40B4-BE49-F238E27FC236}">
-                <a16:creationId xmlns:a16="http://schemas.microsoft.com/office/drawing/2014/main" id="{0B9D6CBF-1DE5-4CBC-9974-D8B43FADCF12}"/>
+              <a:t>Modelo E-R de seis entidades (escaneo, página, elemento, prueba, resultado, reporte); cada escaneo se persiste en JSON y cada ejecución deja su resultado en el reportero JSON, datos que el panel web consulta; la migración a un gestor de bases de datos es la escalabilidad prevista.</a:t>
+            </a:r>
+            <a:endParaRPr lang="es-CL" sz="950">
+              <a:solidFill>
+                <a:srgbClr val="64748B"/>
+              </a:solidFill>
+              <a:latin typeface="Segoe UI" panose="020B0502040204020203" pitchFamily="34" charset="0"/>
+            </a:endParaRPr>
+          </a:p>
+        </p:txBody>
+      </p:sp>
+      <p:sp>
+        <p:nvSpPr>
+          <p:cNvPr id="20" name="Rectángulo: esquinas redondeadas 19">
+            <a:extLst>
+              <a:ext uri="{FF2B5EF4-FFF2-40B4-BE49-F238E27FC236}">
+                <a16:creationId xmlns:a16="http://schemas.microsoft.com/office/drawing/2014/main" id="{ADCDDA6B-6F43-417C-BFAF-DFE7B1C95B97}"/>
               </a:ext>
             </a:extLst>
           </p:cNvPr>
@@ -20462,12 +20798,12 @@
         </p:nvSpPr>
         <p:spPr>
           <a:xfrm>
-            <a:off x="762000" y="4610100"/>
-            <a:ext cx="10668000" cy="914400"/>
+            <a:off x="762000" y="4699000"/>
+            <a:ext cx="10668000" cy="965200"/>
           </a:xfrm>
           <a:prstGeom prst="roundRect">
             <a:avLst>
-              <a:gd name="adj" fmla="val 10000"/>
+              <a:gd name="adj" fmla="val 8000"/>
             </a:avLst>
           </a:prstGeom>
           <a:solidFill>
@@ -20520,10 +20856,10 @@
       </p:sp>
       <p:sp>
         <p:nvSpPr>
-          <p:cNvPr id="18" name="Rectángulo 17">
-            <a:extLst>
-              <a:ext uri="{FF2B5EF4-FFF2-40B4-BE49-F238E27FC236}">
-                <a16:creationId xmlns:a16="http://schemas.microsoft.com/office/drawing/2014/main" id="{5DF8D927-E044-4831-AA9A-05F381613314}"/>
+          <p:cNvPr id="40" name="Rectángulo 39">
+            <a:extLst>
+              <a:ext uri="{FF2B5EF4-FFF2-40B4-BE49-F238E27FC236}">
+                <a16:creationId xmlns:a16="http://schemas.microsoft.com/office/drawing/2014/main" id="{75D873B6-8DD4-49EE-9DAA-70D6B30C0A73}"/>
               </a:ext>
             </a:extLst>
           </p:cNvPr>
@@ -20532,8 +20868,8 @@
         </p:nvSpPr>
         <p:spPr>
           <a:xfrm>
-            <a:off x="762000" y="4610100"/>
-            <a:ext cx="63500" cy="914400"/>
+            <a:off x="762000" y="4699000"/>
+            <a:ext cx="63500" cy="965200"/>
           </a:xfrm>
           <a:prstGeom prst="rect">
             <a:avLst/>
@@ -20588,10 +20924,10 @@
       </p:sp>
       <p:sp>
         <p:nvSpPr>
-          <p:cNvPr id="19" name="CuadroTexto 18">
-            <a:extLst>
-              <a:ext uri="{FF2B5EF4-FFF2-40B4-BE49-F238E27FC236}">
-                <a16:creationId xmlns:a16="http://schemas.microsoft.com/office/drawing/2014/main" id="{65542727-09DC-4EA5-B765-2661A8F216B6}"/>
+          <p:cNvPr id="41" name="CuadroTexto 40">
+            <a:extLst>
+              <a:ext uri="{FF2B5EF4-FFF2-40B4-BE49-F238E27FC236}">
+                <a16:creationId xmlns:a16="http://schemas.microsoft.com/office/drawing/2014/main" id="{2C855C42-9301-4F92-B414-1B241BA31F2C}"/>
               </a:ext>
             </a:extLst>
           </p:cNvPr>
@@ -20600,7 +20936,7 @@
         </p:nvSpPr>
         <p:spPr>
           <a:xfrm>
-            <a:off x="1041400" y="4711700"/>
+            <a:off x="1041400" y="4762500"/>
             <a:ext cx="10236200" cy="276999"/>
           </a:xfrm>
           <a:prstGeom prst="rect">
@@ -20614,21 +20950,16 @@
           </a:bodyPr>
           <a:lstStyle/>
           <a:p>
-            <a:pPr>
-              <a:spcAft>
-                <a:spcPts val="300"/>
-              </a:spcAft>
-            </a:pPr>
-            <a:r>
-              <a:rPr lang="es-MX" sz="1100" b="1">
+            <a:r>
+              <a:rPr lang="es-MX" sz="1200" b="1">
                 <a:solidFill>
                   <a:srgbClr val="1E293B"/>
                 </a:solidFill>
                 <a:latin typeface="Segoe UI" panose="020B0502040204020203" pitchFamily="34" charset="0"/>
               </a:rPr>
-              <a:t>Planificar y controlar proyectos de tecnología, tomando decisiones fundamentadas para el cumplimiento de los objetivos.</a:t>
-            </a:r>
-            <a:endParaRPr lang="es-CL" sz="1100" b="1">
+              <a:t>Desarrollar una solución de software sistematizando el desarrollo y el mantenimiento</a:t>
+            </a:r>
+            <a:endParaRPr lang="es-CL" sz="1200" b="1">
               <a:solidFill>
                 <a:srgbClr val="1E293B"/>
               </a:solidFill>
@@ -20639,10 +20970,10 @@
       </p:sp>
       <p:sp>
         <p:nvSpPr>
-          <p:cNvPr id="20" name="CuadroTexto 19">
-            <a:extLst>
-              <a:ext uri="{FF2B5EF4-FFF2-40B4-BE49-F238E27FC236}">
-                <a16:creationId xmlns:a16="http://schemas.microsoft.com/office/drawing/2014/main" id="{A86BFE0A-FE3F-4E63-8D0B-6854D1265AD1}"/>
+          <p:cNvPr id="42" name="CuadroTexto 41">
+            <a:extLst>
+              <a:ext uri="{FF2B5EF4-FFF2-40B4-BE49-F238E27FC236}">
+                <a16:creationId xmlns:a16="http://schemas.microsoft.com/office/drawing/2014/main" id="{82E9F02C-4668-4A4C-AE56-C20E5089FA54}"/>
               </a:ext>
             </a:extLst>
           </p:cNvPr>
@@ -20651,7 +20982,7 @@
         </p:nvSpPr>
         <p:spPr>
           <a:xfrm>
-            <a:off x="1041400" y="5168900"/>
+            <a:off x="1041400" y="5003800"/>
             <a:ext cx="10236200" cy="276999"/>
           </a:xfrm>
           <a:prstGeom prst="rect">
@@ -20665,266 +20996,61 @@
           </a:bodyPr>
           <a:lstStyle/>
           <a:p>
-            <a:pPr>
-              <a:spcAft>
-                <a:spcPts val="300"/>
-              </a:spcAft>
-            </a:pPr>
-            <a:r>
-              <a:rPr lang="es-MX" sz="1000">
+            <a:r>
+              <a:rPr lang="es-CL" sz="950" b="1">
+                <a:solidFill>
+                  <a:srgbClr val="F59E0B"/>
+                </a:solidFill>
+                <a:latin typeface="Segoe UI" panose="020B0502040204020203" pitchFamily="34" charset="0"/>
+              </a:rPr>
+              <a:t>Construye · Integra · Implanta</a:t>
+            </a:r>
+          </a:p>
+        </p:txBody>
+      </p:sp>
+      <p:sp>
+        <p:nvSpPr>
+          <p:cNvPr id="43" name="CuadroTexto 42">
+            <a:extLst>
+              <a:ext uri="{FF2B5EF4-FFF2-40B4-BE49-F238E27FC236}">
+                <a16:creationId xmlns:a16="http://schemas.microsoft.com/office/drawing/2014/main" id="{85D84E80-B084-4228-A38D-53CB7BF5BDE0}"/>
+              </a:ext>
+            </a:extLst>
+          </p:cNvPr>
+          <p:cNvSpPr txBox="1"/>
+          <p:nvPr/>
+        </p:nvSpPr>
+        <p:spPr>
+          <a:xfrm>
+            <a:off x="1041400" y="5207000"/>
+            <a:ext cx="10236200" cy="276999"/>
+          </a:xfrm>
+          <a:prstGeom prst="rect">
+            <a:avLst/>
+          </a:prstGeom>
+          <a:noFill/>
+        </p:spPr>
+        <p:txBody>
+          <a:bodyPr vert="horz" wrap="square" lIns="0" tIns="0" rIns="0" bIns="0" rtlCol="0" anchor="t">
+            <a:noAutofit/>
+          </a:bodyPr>
+          <a:lstStyle/>
+          <a:p>
+            <a:r>
+              <a:rPr lang="es-MX" sz="950">
                 <a:solidFill>
                   <a:srgbClr val="64748B"/>
                 </a:solidFill>
                 <a:latin typeface="Segoe UI" panose="020B0502040204020203" pitchFamily="34" charset="0"/>
               </a:rPr>
-              <a:t>Evidencia: Scrum, backlog priorizado en 4 sprints, Poker Planning, control de versiones y monitoreo del plan de trabajo.</a:t>
-            </a:r>
-            <a:endParaRPr lang="es-CL" sz="1000">
+              <a:t>Framework en TypeScript y Node.js (CLI, escáner, generador, crawler); integra Playwright, panel web, reportes y sitio demo en un flujo desde el archivo .env; implantación operativa en local, con la ejecución en la nube planificada para las semanas 13 y 14.</a:t>
+            </a:r>
+            <a:endParaRPr lang="es-CL" sz="950">
               <a:solidFill>
                 <a:srgbClr val="64748B"/>
               </a:solidFill>
               <a:latin typeface="Segoe UI" panose="020B0502040204020203" pitchFamily="34" charset="0"/>
             </a:endParaRPr>
-          </a:p>
-        </p:txBody>
-      </p:sp>
-      <p:sp>
-        <p:nvSpPr>
-          <p:cNvPr id="21" name="Rectángulo: esquinas redondeadas 20">
-            <a:extLst>
-              <a:ext uri="{FF2B5EF4-FFF2-40B4-BE49-F238E27FC236}">
-                <a16:creationId xmlns:a16="http://schemas.microsoft.com/office/drawing/2014/main" id="{BEF7D1FE-92BB-4003-8424-8AE0E3E03296}"/>
-              </a:ext>
-            </a:extLst>
-          </p:cNvPr>
-          <p:cNvSpPr/>
-          <p:nvPr/>
-        </p:nvSpPr>
-        <p:spPr>
-          <a:xfrm>
-            <a:off x="762000" y="5676900"/>
-            <a:ext cx="10668000" cy="558800"/>
-          </a:xfrm>
-          <a:prstGeom prst="roundRect">
-            <a:avLst>
-              <a:gd name="adj" fmla="val 15000"/>
-            </a:avLst>
-          </a:prstGeom>
-          <a:solidFill>
-            <a:srgbClr val="EEF2FF"/>
-          </a:solidFill>
-          <a:ln w="12700" cap="flat" cmpd="sng" algn="ctr">
-            <a:noFill/>
-            <a:prstDash val="solid"/>
-            <a:miter lim="800000"/>
-          </a:ln>
-          <a:effectLst/>
-          <a:extLst>
-            <a:ext uri="{91240B29-F687-4F45-9708-019B960494DF}">
-              <a14:hiddenLine xmlns:a14="http://schemas.microsoft.com/office/drawing/2010/main" w="12700" cap="flat" cmpd="sng" algn="ctr">
-                <a:solidFill>
-                  <a:schemeClr val="accent1">
-                    <a:shade val="50000"/>
-                  </a:schemeClr>
-                </a:solidFill>
-                <a:prstDash val="solid"/>
-                <a:miter lim="800000"/>
-              </a14:hiddenLine>
-            </a:ext>
-          </a:extLst>
-        </p:spPr>
-        <p:style>
-          <a:lnRef idx="2">
-            <a:schemeClr val="accent1">
-              <a:shade val="50000"/>
-            </a:schemeClr>
-          </a:lnRef>
-          <a:fillRef idx="1">
-            <a:schemeClr val="accent1"/>
-          </a:fillRef>
-          <a:effectRef idx="0">
-            <a:schemeClr val="accent1"/>
-          </a:effectRef>
-          <a:fontRef idx="minor">
-            <a:schemeClr val="lt1"/>
-          </a:fontRef>
-        </p:style>
-        <p:txBody>
-          <a:bodyPr rtlCol="0" anchor="ctr"/>
-          <a:lstStyle/>
-          <a:p>
-            <a:pPr algn="ctr"/>
-            <a:endParaRPr lang="es-CL"/>
-          </a:p>
-        </p:txBody>
-      </p:sp>
-      <p:sp>
-        <p:nvSpPr>
-          <p:cNvPr id="22" name="CuadroTexto 21">
-            <a:extLst>
-              <a:ext uri="{FF2B5EF4-FFF2-40B4-BE49-F238E27FC236}">
-                <a16:creationId xmlns:a16="http://schemas.microsoft.com/office/drawing/2014/main" id="{5EE8C9BA-70AB-4147-9816-13E18365BD94}"/>
-              </a:ext>
-            </a:extLst>
-          </p:cNvPr>
-          <p:cNvSpPr txBox="1"/>
-          <p:nvPr/>
-        </p:nvSpPr>
-        <p:spPr>
-          <a:xfrm>
-            <a:off x="1041400" y="5816600"/>
-            <a:ext cx="10160000" cy="276999"/>
-          </a:xfrm>
-          <a:prstGeom prst="rect">
-            <a:avLst/>
-          </a:prstGeom>
-          <a:noFill/>
-        </p:spPr>
-        <p:txBody>
-          <a:bodyPr vert="horz" wrap="square" lIns="0" tIns="0" rIns="0" bIns="0" rtlCol="0" anchor="t">
-            <a:noAutofit/>
-          </a:bodyPr>
-          <a:lstStyle/>
-          <a:p>
-            <a:pPr>
-              <a:spcAft>
-                <a:spcPts val="300"/>
-              </a:spcAft>
-            </a:pPr>
-            <a:r>
-              <a:rPr lang="es-MX" sz="1150" b="1">
-                <a:solidFill>
-                  <a:srgbClr val="4F46E5"/>
-                </a:solidFill>
-                <a:latin typeface="Segoe UI" panose="020B0502040204020203" pitchFamily="34" charset="0"/>
-              </a:rPr>
-              <a:t>El proyecto integra las cuatro competencias declaradas en el Informe Final (apartado de competencias).</a:t>
-            </a:r>
-            <a:endParaRPr lang="es-CL" sz="1150" b="1">
-              <a:solidFill>
-                <a:srgbClr val="4F46E5"/>
-              </a:solidFill>
-              <a:latin typeface="Segoe UI" panose="020B0502040204020203" pitchFamily="34" charset="0"/>
-            </a:endParaRPr>
-          </a:p>
-        </p:txBody>
-      </p:sp>
-      <p:sp>
-        <p:nvSpPr>
-          <p:cNvPr id="23" name="CuadroTexto 22">
-            <a:extLst>
-              <a:ext uri="{FF2B5EF4-FFF2-40B4-BE49-F238E27FC236}">
-                <a16:creationId xmlns:a16="http://schemas.microsoft.com/office/drawing/2014/main" id="{DFD725A4-B55D-414D-8F74-D5492BA2B161}"/>
-              </a:ext>
-            </a:extLst>
-          </p:cNvPr>
-          <p:cNvSpPr txBox="1"/>
-          <p:nvPr/>
-        </p:nvSpPr>
-        <p:spPr>
-          <a:xfrm>
-            <a:off x="762000" y="6451600"/>
-            <a:ext cx="7112000" cy="276999"/>
-          </a:xfrm>
-          <a:prstGeom prst="rect">
-            <a:avLst/>
-          </a:prstGeom>
-          <a:noFill/>
-        </p:spPr>
-        <p:txBody>
-          <a:bodyPr vert="horz" wrap="square" lIns="0" tIns="0" rIns="0" bIns="0" rtlCol="0" anchor="t">
-            <a:noAutofit/>
-          </a:bodyPr>
-          <a:lstStyle/>
-          <a:p>
-            <a:pPr>
-              <a:spcAft>
-                <a:spcPts val="300"/>
-              </a:spcAft>
-            </a:pPr>
-            <a:r>
-              <a:rPr lang="es-MX" sz="900">
-                <a:solidFill>
-                  <a:srgbClr val="94A3B8"/>
-                </a:solidFill>
-                <a:latin typeface="Segoe UI" panose="020B0502040204020203" pitchFamily="34" charset="0"/>
-              </a:rPr>
-              <a:t>CACHAI-QA  .  Proyecto APT  .  Evaluacion Sumativa 2</a:t>
-            </a:r>
-            <a:endParaRPr lang="es-CL" sz="900">
-              <a:solidFill>
-                <a:srgbClr val="94A3B8"/>
-              </a:solidFill>
-              <a:latin typeface="Segoe UI" panose="020B0502040204020203" pitchFamily="34" charset="0"/>
-            </a:endParaRPr>
-          </a:p>
-        </p:txBody>
-      </p:sp>
-      <p:sp>
-        <p:nvSpPr>
-          <p:cNvPr id="25" name="Rectángulo 24">
-            <a:extLst>
-              <a:ext uri="{FF2B5EF4-FFF2-40B4-BE49-F238E27FC236}">
-                <a16:creationId xmlns:a16="http://schemas.microsoft.com/office/drawing/2014/main" id="{6A3A2EED-7C1A-45F3-8685-B61F583BB8A8}"/>
-              </a:ext>
-            </a:extLst>
-          </p:cNvPr>
-          <p:cNvSpPr/>
-          <p:nvPr/>
-        </p:nvSpPr>
-        <p:spPr>
-          <a:xfrm>
-            <a:off x="762000" y="6375400"/>
-            <a:ext cx="10668000" cy="9525"/>
-          </a:xfrm>
-          <a:prstGeom prst="rect">
-            <a:avLst/>
-          </a:prstGeom>
-          <a:solidFill>
-            <a:srgbClr val="E2E8F0"/>
-          </a:solidFill>
-          <a:ln w="12700" cap="flat" cmpd="sng" algn="ctr">
-            <a:noFill/>
-            <a:prstDash val="solid"/>
-            <a:miter lim="800000"/>
-          </a:ln>
-          <a:effectLst/>
-          <a:extLst>
-            <a:ext uri="{91240B29-F687-4F45-9708-019B960494DF}">
-              <a14:hiddenLine xmlns:a14="http://schemas.microsoft.com/office/drawing/2010/main" w="12700" cap="flat" cmpd="sng" algn="ctr">
-                <a:solidFill>
-                  <a:schemeClr val="accent1">
-                    <a:shade val="50000"/>
-                  </a:schemeClr>
-                </a:solidFill>
-                <a:prstDash val="solid"/>
-                <a:miter lim="800000"/>
-              </a14:hiddenLine>
-            </a:ext>
-          </a:extLst>
-        </p:spPr>
-        <p:style>
-          <a:lnRef idx="2">
-            <a:schemeClr val="accent1">
-              <a:shade val="50000"/>
-            </a:schemeClr>
-          </a:lnRef>
-          <a:fillRef idx="1">
-            <a:schemeClr val="accent1"/>
-          </a:fillRef>
-          <a:effectRef idx="0">
-            <a:schemeClr val="accent1"/>
-          </a:effectRef>
-          <a:fontRef idx="minor">
-            <a:schemeClr val="lt1"/>
-          </a:fontRef>
-        </p:style>
-        <p:txBody>
-          <a:bodyPr rtlCol="0" anchor="ctr"/>
-          <a:lstStyle/>
-          <a:p>
-            <a:pPr algn="ctr"/>
-            <a:endParaRPr lang="es-CL"/>
           </a:p>
         </p:txBody>
       </p:sp>
